--- a/2.Texto/Imag/arquitectura_alto_nivel.pptx
+++ b/2.Texto/Imag/arquitectura_alto_nivel.pptx
@@ -1336,7 +1336,7 @@
                 <a:ea typeface="Arial" pitchFamily="34" charset="-122"/>
                 <a:cs typeface="Arial" pitchFamily="34" charset="-120"/>
               </a:rPr>
-              <a:t>Control PID (sintonizado con PSO) y lectura de </a:t>
+              <a:t>Control PI incremental y lectura de </a:t>
             </a:r>
             <a:r>
               <a:rPr lang="es-ES" sz="790" noProof="0" dirty="0" err="1">
